--- a/Slide/MicroController/08.Timer.pptx
+++ b/Slide/MicroController/08.Timer.pptx
@@ -13,8 +13,9 @@
     <p:sldId id="288" r:id="rId7"/>
     <p:sldId id="289" r:id="rId8"/>
     <p:sldId id="290" r:id="rId9"/>
-    <p:sldId id="291" r:id="rId10"/>
-    <p:sldId id="283" r:id="rId11"/>
+    <p:sldId id="292" r:id="rId10"/>
+    <p:sldId id="291" r:id="rId11"/>
+    <p:sldId id="283" r:id="rId12"/>
   </p:sldIdLst>
   <p:sldSz cx="12192000" cy="6858000"/>
   <p:notesSz cx="6858000" cy="9144000"/>
@@ -261,7 +262,7 @@
           <a:p>
             <a:fld id="{ECA3AE87-C17F-4F2C-92FF-7FE21F8A66BE}" type="datetimeFigureOut">
               <a:rPr lang="en-US" smtClean="0"/>
-              <a:t>2/2/2025</a:t>
+              <a:t>2/11/2025</a:t>
             </a:fld>
             <a:endParaRPr lang="en-US"/>
           </a:p>
@@ -429,7 +430,7 @@
           <a:p>
             <a:fld id="{ECA3AE87-C17F-4F2C-92FF-7FE21F8A66BE}" type="datetimeFigureOut">
               <a:rPr lang="en-US" smtClean="0"/>
-              <a:t>2/2/2025</a:t>
+              <a:t>2/11/2025</a:t>
             </a:fld>
             <a:endParaRPr lang="en-US"/>
           </a:p>
@@ -607,7 +608,7 @@
           <a:p>
             <a:fld id="{ECA3AE87-C17F-4F2C-92FF-7FE21F8A66BE}" type="datetimeFigureOut">
               <a:rPr lang="en-US" smtClean="0"/>
-              <a:t>2/2/2025</a:t>
+              <a:t>2/11/2025</a:t>
             </a:fld>
             <a:endParaRPr lang="en-US"/>
           </a:p>
@@ -775,7 +776,7 @@
           <a:p>
             <a:fld id="{ECA3AE87-C17F-4F2C-92FF-7FE21F8A66BE}" type="datetimeFigureOut">
               <a:rPr lang="en-US" smtClean="0"/>
-              <a:t>2/2/2025</a:t>
+              <a:t>2/11/2025</a:t>
             </a:fld>
             <a:endParaRPr lang="en-US"/>
           </a:p>
@@ -1020,7 +1021,7 @@
           <a:p>
             <a:fld id="{ECA3AE87-C17F-4F2C-92FF-7FE21F8A66BE}" type="datetimeFigureOut">
               <a:rPr lang="en-US" smtClean="0"/>
-              <a:t>2/2/2025</a:t>
+              <a:t>2/11/2025</a:t>
             </a:fld>
             <a:endParaRPr lang="en-US"/>
           </a:p>
@@ -1249,7 +1250,7 @@
           <a:p>
             <a:fld id="{ECA3AE87-C17F-4F2C-92FF-7FE21F8A66BE}" type="datetimeFigureOut">
               <a:rPr lang="en-US" smtClean="0"/>
-              <a:t>2/2/2025</a:t>
+              <a:t>2/11/2025</a:t>
             </a:fld>
             <a:endParaRPr lang="en-US"/>
           </a:p>
@@ -1613,7 +1614,7 @@
           <a:p>
             <a:fld id="{ECA3AE87-C17F-4F2C-92FF-7FE21F8A66BE}" type="datetimeFigureOut">
               <a:rPr lang="en-US" smtClean="0"/>
-              <a:t>2/2/2025</a:t>
+              <a:t>2/11/2025</a:t>
             </a:fld>
             <a:endParaRPr lang="en-US"/>
           </a:p>
@@ -1730,7 +1731,7 @@
           <a:p>
             <a:fld id="{ECA3AE87-C17F-4F2C-92FF-7FE21F8A66BE}" type="datetimeFigureOut">
               <a:rPr lang="en-US" smtClean="0"/>
-              <a:t>2/2/2025</a:t>
+              <a:t>2/11/2025</a:t>
             </a:fld>
             <a:endParaRPr lang="en-US"/>
           </a:p>
@@ -1825,7 +1826,7 @@
           <a:p>
             <a:fld id="{ECA3AE87-C17F-4F2C-92FF-7FE21F8A66BE}" type="datetimeFigureOut">
               <a:rPr lang="en-US" smtClean="0"/>
-              <a:t>2/2/2025</a:t>
+              <a:t>2/11/2025</a:t>
             </a:fld>
             <a:endParaRPr lang="en-US"/>
           </a:p>
@@ -2100,7 +2101,7 @@
           <a:p>
             <a:fld id="{ECA3AE87-C17F-4F2C-92FF-7FE21F8A66BE}" type="datetimeFigureOut">
               <a:rPr lang="en-US" smtClean="0"/>
-              <a:t>2/2/2025</a:t>
+              <a:t>2/11/2025</a:t>
             </a:fld>
             <a:endParaRPr lang="en-US"/>
           </a:p>
@@ -2352,7 +2353,7 @@
           <a:p>
             <a:fld id="{ECA3AE87-C17F-4F2C-92FF-7FE21F8A66BE}" type="datetimeFigureOut">
               <a:rPr lang="en-US" smtClean="0"/>
-              <a:t>2/2/2025</a:t>
+              <a:t>2/11/2025</a:t>
             </a:fld>
             <a:endParaRPr lang="en-US"/>
           </a:p>
@@ -2563,7 +2564,7 @@
           <a:p>
             <a:fld id="{ECA3AE87-C17F-4F2C-92FF-7FE21F8A66BE}" type="datetimeFigureOut">
               <a:rPr lang="en-US" smtClean="0"/>
-              <a:t>2/2/2025</a:t>
+              <a:t>2/11/2025</a:t>
             </a:fld>
             <a:endParaRPr lang="en-US"/>
           </a:p>
@@ -3125,6 +3126,188 @@
   <p:cSld>
     <p:spTree>
       <p:nvGrpSpPr>
+        <p:cNvPr id="1" name="">
+          <a:extLst>
+            <a:ext uri="{FF2B5EF4-FFF2-40B4-BE49-F238E27FC236}">
+              <a16:creationId xmlns:a16="http://schemas.microsoft.com/office/drawing/2014/main" id="{AB0434CB-FF93-3FD7-4D24-79A344DA135D}"/>
+            </a:ext>
+          </a:extLst>
+        </p:cNvPr>
+        <p:cNvGrpSpPr/>
+        <p:nvPr/>
+      </p:nvGrpSpPr>
+      <p:grpSpPr>
+        <a:xfrm>
+          <a:off x="0" y="0"/>
+          <a:ext cx="0" cy="0"/>
+          <a:chOff x="0" y="0"/>
+          <a:chExt cx="0" cy="0"/>
+        </a:xfrm>
+      </p:grpSpPr>
+      <p:pic>
+        <p:nvPicPr>
+          <p:cNvPr id="6" name="Picture 5">
+            <a:extLst>
+              <a:ext uri="{FF2B5EF4-FFF2-40B4-BE49-F238E27FC236}">
+                <a16:creationId xmlns:a16="http://schemas.microsoft.com/office/drawing/2014/main" id="{86D40E1F-9205-900C-7A94-A7CA020AE47A}"/>
+              </a:ext>
+            </a:extLst>
+          </p:cNvPr>
+          <p:cNvPicPr>
+            <a:picLocks noChangeAspect="1"/>
+          </p:cNvPicPr>
+          <p:nvPr/>
+        </p:nvPicPr>
+        <p:blipFill>
+          <a:blip r:embed="rId2" cstate="print">
+            <a:extLst>
+              <a:ext uri="{28A0092B-C50C-407E-A947-70E740481C1C}">
+                <a14:useLocalDpi xmlns:a14="http://schemas.microsoft.com/office/drawing/2010/main" val="0"/>
+              </a:ext>
+            </a:extLst>
+          </a:blip>
+          <a:stretch>
+            <a:fillRect/>
+          </a:stretch>
+        </p:blipFill>
+        <p:spPr>
+          <a:xfrm>
+            <a:off x="-117663" y="-89806"/>
+            <a:ext cx="12277005" cy="1420585"/>
+          </a:xfrm>
+          <a:prstGeom prst="rect">
+            <a:avLst/>
+          </a:prstGeom>
+        </p:spPr>
+      </p:pic>
+      <p:sp>
+        <p:nvSpPr>
+          <p:cNvPr id="2" name="TextBox 1">
+            <a:extLst>
+              <a:ext uri="{FF2B5EF4-FFF2-40B4-BE49-F238E27FC236}">
+                <a16:creationId xmlns:a16="http://schemas.microsoft.com/office/drawing/2014/main" id="{9BBDB6A1-B453-74C9-83B6-15561EB29DB0}"/>
+              </a:ext>
+            </a:extLst>
+          </p:cNvPr>
+          <p:cNvSpPr txBox="1"/>
+          <p:nvPr/>
+        </p:nvSpPr>
+        <p:spPr>
+          <a:xfrm>
+            <a:off x="499933" y="1406106"/>
+            <a:ext cx="5520906" cy="707886"/>
+          </a:xfrm>
+          <a:prstGeom prst="rect">
+            <a:avLst/>
+          </a:prstGeom>
+          <a:solidFill>
+            <a:srgbClr val="EF9C66"/>
+          </a:solidFill>
+        </p:spPr>
+        <p:txBody>
+          <a:bodyPr wrap="square" rtlCol="0">
+            <a:spAutoFit/>
+          </a:bodyPr>
+          <a:lstStyle/>
+          <a:p>
+            <a:r>
+              <a:rPr lang="en-US" sz="4000"/>
+              <a:t>Input clock source</a:t>
+            </a:r>
+            <a:endParaRPr lang="en-US" sz="4000" dirty="0"/>
+          </a:p>
+        </p:txBody>
+      </p:sp>
+      <p:sp>
+        <p:nvSpPr>
+          <p:cNvPr id="3" name="TextBox 2">
+            <a:extLst>
+              <a:ext uri="{FF2B5EF4-FFF2-40B4-BE49-F238E27FC236}">
+                <a16:creationId xmlns:a16="http://schemas.microsoft.com/office/drawing/2014/main" id="{9B740E6E-484C-E794-BBCC-4D8094A7A5DD}"/>
+              </a:ext>
+            </a:extLst>
+          </p:cNvPr>
+          <p:cNvSpPr txBox="1"/>
+          <p:nvPr/>
+        </p:nvSpPr>
+        <p:spPr>
+          <a:xfrm>
+            <a:off x="499932" y="2305050"/>
+            <a:ext cx="5952626" cy="2062103"/>
+          </a:xfrm>
+          <a:prstGeom prst="rect">
+            <a:avLst/>
+          </a:prstGeom>
+          <a:solidFill>
+            <a:srgbClr val="C8CFA0"/>
+          </a:solidFill>
+        </p:spPr>
+        <p:txBody>
+          <a:bodyPr wrap="square" rtlCol="0">
+            <a:spAutoFit/>
+          </a:bodyPr>
+          <a:lstStyle/>
+          <a:p>
+            <a:pPr marL="285750" indent="-285750">
+              <a:buFont typeface="Arial" panose="020B0604020202020204" pitchFamily="34" charset="0"/>
+              <a:buChar char="•"/>
+            </a:pPr>
+            <a:r>
+              <a:rPr lang="en-US" sz="3200"/>
+              <a:t>Internal clock (CK_INT)</a:t>
+            </a:r>
+          </a:p>
+          <a:p>
+            <a:pPr marL="285750" indent="-285750">
+              <a:buFont typeface="Arial" panose="020B0604020202020204" pitchFamily="34" charset="0"/>
+              <a:buChar char="•"/>
+            </a:pPr>
+            <a:r>
+              <a:rPr lang="en-US" sz="3200"/>
+              <a:t>External clock mode1</a:t>
+            </a:r>
+          </a:p>
+          <a:p>
+            <a:pPr marL="285750" indent="-285750">
+              <a:buFont typeface="Arial" panose="020B0604020202020204" pitchFamily="34" charset="0"/>
+              <a:buChar char="•"/>
+            </a:pPr>
+            <a:r>
+              <a:rPr lang="en-US" sz="3200"/>
+              <a:t>External clock mode2</a:t>
+            </a:r>
+          </a:p>
+          <a:p>
+            <a:pPr marL="285750" indent="-285750">
+              <a:buFont typeface="Arial" panose="020B0604020202020204" pitchFamily="34" charset="0"/>
+              <a:buChar char="•"/>
+            </a:pPr>
+            <a:r>
+              <a:rPr lang="en-US" sz="3200"/>
+              <a:t>Internal trigger inputs (ITRx)</a:t>
+            </a:r>
+            <a:endParaRPr lang="en-US" sz="3200" dirty="0"/>
+          </a:p>
+        </p:txBody>
+      </p:sp>
+    </p:spTree>
+    <p:extLst>
+      <p:ext uri="{BB962C8B-B14F-4D97-AF65-F5344CB8AC3E}">
+        <p14:creationId xmlns:p14="http://schemas.microsoft.com/office/powerpoint/2010/main" val="472883612"/>
+      </p:ext>
+    </p:extLst>
+  </p:cSld>
+  <p:clrMapOvr>
+    <a:masterClrMapping/>
+  </p:clrMapOvr>
+</p:sld>
+</file>
+
+<file path=ppt/slides/slide11.xml><?xml version="1.0" encoding="utf-8"?>
+<p:sld xmlns:a="http://schemas.openxmlformats.org/drawingml/2006/main" xmlns:r="http://schemas.openxmlformats.org/officeDocument/2006/relationships" xmlns:p="http://schemas.openxmlformats.org/presentationml/2006/main">
+  <p:cSld>
+    <p:spTree>
+      <p:nvGrpSpPr>
         <p:cNvPr id="1" name=""/>
         <p:cNvGrpSpPr/>
         <p:nvPr/>
@@ -4633,7 +4816,7 @@
         <p:cNvPr id="1" name="">
           <a:extLst>
             <a:ext uri="{FF2B5EF4-FFF2-40B4-BE49-F238E27FC236}">
-              <a16:creationId xmlns:a16="http://schemas.microsoft.com/office/drawing/2014/main" id="{AB0434CB-FF93-3FD7-4D24-79A344DA135D}"/>
+              <a16:creationId xmlns:a16="http://schemas.microsoft.com/office/drawing/2014/main" id="{E5E5D092-881B-F529-6286-848F31C8AC87}"/>
             </a:ext>
           </a:extLst>
         </p:cNvPr>
@@ -4653,7 +4836,7 @@
           <p:cNvPr id="6" name="Picture 5">
             <a:extLst>
               <a:ext uri="{FF2B5EF4-FFF2-40B4-BE49-F238E27FC236}">
-                <a16:creationId xmlns:a16="http://schemas.microsoft.com/office/drawing/2014/main" id="{86D40E1F-9205-900C-7A94-A7CA020AE47A}"/>
+                <a16:creationId xmlns:a16="http://schemas.microsoft.com/office/drawing/2014/main" id="{0C333794-7112-A4BE-385C-52D5F1001F27}"/>
               </a:ext>
             </a:extLst>
           </p:cNvPr>
@@ -4689,7 +4872,7 @@
           <p:cNvPr id="2" name="TextBox 1">
             <a:extLst>
               <a:ext uri="{FF2B5EF4-FFF2-40B4-BE49-F238E27FC236}">
-                <a16:creationId xmlns:a16="http://schemas.microsoft.com/office/drawing/2014/main" id="{9BBDB6A1-B453-74C9-83B6-15561EB29DB0}"/>
+                <a16:creationId xmlns:a16="http://schemas.microsoft.com/office/drawing/2014/main" id="{EC72F052-CD64-3575-FD0A-31168EE6FE6F}"/>
               </a:ext>
             </a:extLst>
           </p:cNvPr>
@@ -4716,7 +4899,7 @@
           <a:p>
             <a:r>
               <a:rPr lang="en-US" sz="4000"/>
-              <a:t>Input clock source</a:t>
+              <a:t>Debug issue</a:t>
             </a:r>
             <a:endParaRPr lang="en-US" sz="4000" dirty="0"/>
           </a:p>
@@ -4727,7 +4910,7 @@
           <p:cNvPr id="3" name="TextBox 2">
             <a:extLst>
               <a:ext uri="{FF2B5EF4-FFF2-40B4-BE49-F238E27FC236}">
-                <a16:creationId xmlns:a16="http://schemas.microsoft.com/office/drawing/2014/main" id="{9B740E6E-484C-E794-BBCC-4D8094A7A5DD}"/>
+                <a16:creationId xmlns:a16="http://schemas.microsoft.com/office/drawing/2014/main" id="{6D6F2D46-DA42-2A05-2BE2-4B5F6082CD9C}"/>
               </a:ext>
             </a:extLst>
           </p:cNvPr>
@@ -4736,8 +4919,8 @@
         </p:nvSpPr>
         <p:spPr>
           <a:xfrm>
-            <a:off x="499932" y="2305050"/>
-            <a:ext cx="5952626" cy="2062103"/>
+            <a:off x="499933" y="2305051"/>
+            <a:ext cx="9241596" cy="584775"/>
           </a:xfrm>
           <a:prstGeom prst="rect">
             <a:avLst/>
@@ -4758,46 +4941,593 @@
             </a:pPr>
             <a:r>
               <a:rPr lang="en-US" sz="3200"/>
-              <a:t>Internal clock (CK_INT)</a:t>
-            </a:r>
-          </a:p>
-          <a:p>
-            <a:pPr marL="285750" indent="-285750">
-              <a:buFont typeface="Arial" panose="020B0604020202020204" pitchFamily="34" charset="0"/>
-              <a:buChar char="•"/>
-            </a:pPr>
-            <a:r>
-              <a:rPr lang="en-US" sz="3200"/>
-              <a:t>External clock mode1</a:t>
-            </a:r>
-          </a:p>
-          <a:p>
-            <a:pPr marL="285750" indent="-285750">
-              <a:buFont typeface="Arial" panose="020B0604020202020204" pitchFamily="34" charset="0"/>
-              <a:buChar char="•"/>
-            </a:pPr>
-            <a:r>
-              <a:rPr lang="en-US" sz="3200"/>
-              <a:t>External clock mode2</a:t>
-            </a:r>
-          </a:p>
-          <a:p>
-            <a:pPr marL="285750" indent="-285750">
-              <a:buFont typeface="Arial" panose="020B0604020202020204" pitchFamily="34" charset="0"/>
-              <a:buChar char="•"/>
-            </a:pPr>
-            <a:r>
-              <a:rPr lang="en-US" sz="3200"/>
-              <a:t>Internal trigger inputs (ITRx)</a:t>
+              <a:t>Write CNT = 0, but when debug, will see value != 0</a:t>
             </a:r>
             <a:endParaRPr lang="en-US" sz="3200" dirty="0"/>
+          </a:p>
+        </p:txBody>
+      </p:sp>
+      <p:sp>
+        <p:nvSpPr>
+          <p:cNvPr id="4" name="Rectangle 3">
+            <a:extLst>
+              <a:ext uri="{FF2B5EF4-FFF2-40B4-BE49-F238E27FC236}">
+                <a16:creationId xmlns:a16="http://schemas.microsoft.com/office/drawing/2014/main" id="{5E5BF17F-907F-0163-C924-D813B40FAFFB}"/>
+              </a:ext>
+            </a:extLst>
+          </p:cNvPr>
+          <p:cNvSpPr/>
+          <p:nvPr/>
+        </p:nvSpPr>
+        <p:spPr>
+          <a:xfrm>
+            <a:off x="2091351" y="3864098"/>
+            <a:ext cx="1602462" cy="882749"/>
+          </a:xfrm>
+          <a:prstGeom prst="rect">
+            <a:avLst/>
+          </a:prstGeom>
+          <a:solidFill>
+            <a:srgbClr val="0070C0"/>
+          </a:solidFill>
+        </p:spPr>
+        <p:style>
+          <a:lnRef idx="2">
+            <a:schemeClr val="accent1">
+              <a:shade val="15000"/>
+            </a:schemeClr>
+          </a:lnRef>
+          <a:fillRef idx="1">
+            <a:schemeClr val="accent1"/>
+          </a:fillRef>
+          <a:effectRef idx="0">
+            <a:schemeClr val="accent1"/>
+          </a:effectRef>
+          <a:fontRef idx="minor">
+            <a:schemeClr val="lt1"/>
+          </a:fontRef>
+        </p:style>
+        <p:txBody>
+          <a:bodyPr rtlCol="0" anchor="ctr"/>
+          <a:lstStyle/>
+          <a:p>
+            <a:pPr algn="ctr"/>
+            <a:r>
+              <a:rPr lang="en-US"/>
+              <a:t>CPU</a:t>
+            </a:r>
+          </a:p>
+        </p:txBody>
+      </p:sp>
+      <p:sp>
+        <p:nvSpPr>
+          <p:cNvPr id="5" name="Rectangle 4">
+            <a:extLst>
+              <a:ext uri="{FF2B5EF4-FFF2-40B4-BE49-F238E27FC236}">
+                <a16:creationId xmlns:a16="http://schemas.microsoft.com/office/drawing/2014/main" id="{AC4EF436-CED9-40EC-5C4A-F748619648B7}"/>
+              </a:ext>
+            </a:extLst>
+          </p:cNvPr>
+          <p:cNvSpPr/>
+          <p:nvPr/>
+        </p:nvSpPr>
+        <p:spPr>
+          <a:xfrm>
+            <a:off x="5495454" y="3010405"/>
+            <a:ext cx="2218099" cy="986827"/>
+          </a:xfrm>
+          <a:prstGeom prst="rect">
+            <a:avLst/>
+          </a:prstGeom>
+        </p:spPr>
+        <p:style>
+          <a:lnRef idx="2">
+            <a:schemeClr val="accent4">
+              <a:shade val="15000"/>
+            </a:schemeClr>
+          </a:lnRef>
+          <a:fillRef idx="1">
+            <a:schemeClr val="accent4"/>
+          </a:fillRef>
+          <a:effectRef idx="0">
+            <a:schemeClr val="accent4"/>
+          </a:effectRef>
+          <a:fontRef idx="minor">
+            <a:schemeClr val="lt1"/>
+          </a:fontRef>
+        </p:style>
+        <p:txBody>
+          <a:bodyPr rtlCol="0" anchor="ctr"/>
+          <a:lstStyle/>
+          <a:p>
+            <a:pPr algn="ctr"/>
+            <a:r>
+              <a:rPr lang="en-US"/>
+              <a:t>Memory</a:t>
+            </a:r>
+          </a:p>
+        </p:txBody>
+      </p:sp>
+      <p:sp>
+        <p:nvSpPr>
+          <p:cNvPr id="9" name="Rectangle 8">
+            <a:extLst>
+              <a:ext uri="{FF2B5EF4-FFF2-40B4-BE49-F238E27FC236}">
+                <a16:creationId xmlns:a16="http://schemas.microsoft.com/office/drawing/2014/main" id="{651D703A-4003-A452-BD5E-7F94328505D1}"/>
+              </a:ext>
+            </a:extLst>
+          </p:cNvPr>
+          <p:cNvSpPr/>
+          <p:nvPr/>
+        </p:nvSpPr>
+        <p:spPr>
+          <a:xfrm>
+            <a:off x="4473542" y="5104642"/>
+            <a:ext cx="1167897" cy="869133"/>
+          </a:xfrm>
+          <a:prstGeom prst="rect">
+            <a:avLst/>
+          </a:prstGeom>
+        </p:spPr>
+        <p:style>
+          <a:lnRef idx="2">
+            <a:schemeClr val="accent6">
+              <a:shade val="15000"/>
+            </a:schemeClr>
+          </a:lnRef>
+          <a:fillRef idx="1">
+            <a:schemeClr val="accent6"/>
+          </a:fillRef>
+          <a:effectRef idx="0">
+            <a:schemeClr val="accent6"/>
+          </a:effectRef>
+          <a:fontRef idx="minor">
+            <a:schemeClr val="lt1"/>
+          </a:fontRef>
+        </p:style>
+        <p:txBody>
+          <a:bodyPr rtlCol="0" anchor="ctr"/>
+          <a:lstStyle/>
+          <a:p>
+            <a:pPr algn="ctr"/>
+            <a:r>
+              <a:rPr lang="en-US"/>
+              <a:t>I/O</a:t>
+            </a:r>
+          </a:p>
+        </p:txBody>
+      </p:sp>
+      <p:sp>
+        <p:nvSpPr>
+          <p:cNvPr id="10" name="Rectangle 9">
+            <a:extLst>
+              <a:ext uri="{FF2B5EF4-FFF2-40B4-BE49-F238E27FC236}">
+                <a16:creationId xmlns:a16="http://schemas.microsoft.com/office/drawing/2014/main" id="{5540DD2B-2EFF-7D4C-7015-0035D93DB0EA}"/>
+              </a:ext>
+            </a:extLst>
+          </p:cNvPr>
+          <p:cNvSpPr/>
+          <p:nvPr/>
+        </p:nvSpPr>
+        <p:spPr>
+          <a:xfrm>
+            <a:off x="6138621" y="5104640"/>
+            <a:ext cx="1167897" cy="869133"/>
+          </a:xfrm>
+          <a:prstGeom prst="rect">
+            <a:avLst/>
+          </a:prstGeom>
+        </p:spPr>
+        <p:style>
+          <a:lnRef idx="2">
+            <a:schemeClr val="accent6">
+              <a:shade val="15000"/>
+            </a:schemeClr>
+          </a:lnRef>
+          <a:fillRef idx="1">
+            <a:schemeClr val="accent6"/>
+          </a:fillRef>
+          <a:effectRef idx="0">
+            <a:schemeClr val="accent6"/>
+          </a:effectRef>
+          <a:fontRef idx="minor">
+            <a:schemeClr val="lt1"/>
+          </a:fontRef>
+        </p:style>
+        <p:txBody>
+          <a:bodyPr rtlCol="0" anchor="ctr"/>
+          <a:lstStyle/>
+          <a:p>
+            <a:pPr algn="ctr"/>
+            <a:r>
+              <a:rPr lang="en-US"/>
+              <a:t>GPIO</a:t>
+            </a:r>
+          </a:p>
+        </p:txBody>
+      </p:sp>
+      <p:sp>
+        <p:nvSpPr>
+          <p:cNvPr id="11" name="Rectangle 10">
+            <a:extLst>
+              <a:ext uri="{FF2B5EF4-FFF2-40B4-BE49-F238E27FC236}">
+                <a16:creationId xmlns:a16="http://schemas.microsoft.com/office/drawing/2014/main" id="{320C3EDD-CC5A-5F15-03EF-83B472FDA8B5}"/>
+              </a:ext>
+            </a:extLst>
+          </p:cNvPr>
+          <p:cNvSpPr/>
+          <p:nvPr/>
+        </p:nvSpPr>
+        <p:spPr>
+          <a:xfrm>
+            <a:off x="7788618" y="5027308"/>
+            <a:ext cx="1167897" cy="869133"/>
+          </a:xfrm>
+          <a:prstGeom prst="rect">
+            <a:avLst/>
+          </a:prstGeom>
+        </p:spPr>
+        <p:style>
+          <a:lnRef idx="2">
+            <a:schemeClr val="accent6">
+              <a:shade val="15000"/>
+            </a:schemeClr>
+          </a:lnRef>
+          <a:fillRef idx="1">
+            <a:schemeClr val="accent6"/>
+          </a:fillRef>
+          <a:effectRef idx="0">
+            <a:schemeClr val="accent6"/>
+          </a:effectRef>
+          <a:fontRef idx="minor">
+            <a:schemeClr val="lt1"/>
+          </a:fontRef>
+        </p:style>
+        <p:txBody>
+          <a:bodyPr rtlCol="0" anchor="ctr"/>
+          <a:lstStyle/>
+          <a:p>
+            <a:pPr algn="ctr"/>
+            <a:r>
+              <a:rPr lang="en-US"/>
+              <a:t>Timer</a:t>
+            </a:r>
+          </a:p>
+        </p:txBody>
+      </p:sp>
+      <p:sp>
+        <p:nvSpPr>
+          <p:cNvPr id="12" name="Rectangle 11">
+            <a:extLst>
+              <a:ext uri="{FF2B5EF4-FFF2-40B4-BE49-F238E27FC236}">
+                <a16:creationId xmlns:a16="http://schemas.microsoft.com/office/drawing/2014/main" id="{D314151F-6ED6-F757-DD03-021F73B097CC}"/>
+              </a:ext>
+            </a:extLst>
+          </p:cNvPr>
+          <p:cNvSpPr/>
+          <p:nvPr/>
+        </p:nvSpPr>
+        <p:spPr>
+          <a:xfrm>
+            <a:off x="9512174" y="5104643"/>
+            <a:ext cx="1167897" cy="869133"/>
+          </a:xfrm>
+          <a:prstGeom prst="rect">
+            <a:avLst/>
+          </a:prstGeom>
+        </p:spPr>
+        <p:style>
+          <a:lnRef idx="2">
+            <a:schemeClr val="accent6">
+              <a:shade val="15000"/>
+            </a:schemeClr>
+          </a:lnRef>
+          <a:fillRef idx="1">
+            <a:schemeClr val="accent6"/>
+          </a:fillRef>
+          <a:effectRef idx="0">
+            <a:schemeClr val="accent6"/>
+          </a:effectRef>
+          <a:fontRef idx="minor">
+            <a:schemeClr val="lt1"/>
+          </a:fontRef>
+        </p:style>
+        <p:txBody>
+          <a:bodyPr rtlCol="0" anchor="ctr"/>
+          <a:lstStyle/>
+          <a:p>
+            <a:pPr algn="ctr"/>
+            <a:r>
+              <a:rPr lang="en-US"/>
+              <a:t>ADC</a:t>
+            </a:r>
+          </a:p>
+        </p:txBody>
+      </p:sp>
+      <p:sp>
+        <p:nvSpPr>
+          <p:cNvPr id="13" name="TextBox 12">
+            <a:extLst>
+              <a:ext uri="{FF2B5EF4-FFF2-40B4-BE49-F238E27FC236}">
+                <a16:creationId xmlns:a16="http://schemas.microsoft.com/office/drawing/2014/main" id="{53768868-1619-A8B8-F650-7B8471F09148}"/>
+              </a:ext>
+            </a:extLst>
+          </p:cNvPr>
+          <p:cNvSpPr txBox="1"/>
+          <p:nvPr/>
+        </p:nvSpPr>
+        <p:spPr>
+          <a:xfrm>
+            <a:off x="1004935" y="5251010"/>
+            <a:ext cx="1457608" cy="1200329"/>
+          </a:xfrm>
+          <a:prstGeom prst="rect">
+            <a:avLst/>
+          </a:prstGeom>
+          <a:noFill/>
+        </p:spPr>
+        <p:txBody>
+          <a:bodyPr wrap="square" rtlCol="0">
+            <a:spAutoFit/>
+          </a:bodyPr>
+          <a:lstStyle/>
+          <a:p>
+            <a:r>
+              <a:rPr lang="en-US"/>
+              <a:t>State1</a:t>
+            </a:r>
+          </a:p>
+          <a:p>
+            <a:r>
+              <a:rPr lang="en-US"/>
+              <a:t>State2</a:t>
+            </a:r>
+          </a:p>
+          <a:p>
+            <a:r>
+              <a:rPr lang="en-US"/>
+              <a:t>State3</a:t>
+            </a:r>
+          </a:p>
+          <a:p>
+            <a:endParaRPr lang="en-US"/>
+          </a:p>
+        </p:txBody>
+      </p:sp>
+      <p:cxnSp>
+        <p:nvCxnSpPr>
+          <p:cNvPr id="15" name="Straight Arrow Connector 14">
+            <a:extLst>
+              <a:ext uri="{FF2B5EF4-FFF2-40B4-BE49-F238E27FC236}">
+                <a16:creationId xmlns:a16="http://schemas.microsoft.com/office/drawing/2014/main" id="{1DC5C243-9FE8-2793-F3A7-85BEDB3FC3DF}"/>
+              </a:ext>
+            </a:extLst>
+          </p:cNvPr>
+          <p:cNvCxnSpPr/>
+          <p:nvPr/>
+        </p:nvCxnSpPr>
+        <p:spPr>
+          <a:xfrm>
+            <a:off x="869133" y="4789283"/>
+            <a:ext cx="0" cy="1801640"/>
+          </a:xfrm>
+          <a:prstGeom prst="straightConnector1">
+            <a:avLst/>
+          </a:prstGeom>
+          <a:ln>
+            <a:tailEnd type="triangle"/>
+          </a:ln>
+        </p:spPr>
+        <p:style>
+          <a:lnRef idx="1">
+            <a:schemeClr val="accent1"/>
+          </a:lnRef>
+          <a:fillRef idx="0">
+            <a:schemeClr val="accent1"/>
+          </a:fillRef>
+          <a:effectRef idx="0">
+            <a:schemeClr val="accent1"/>
+          </a:effectRef>
+          <a:fontRef idx="minor">
+            <a:schemeClr val="tx1"/>
+          </a:fontRef>
+        </p:style>
+      </p:cxnSp>
+      <p:cxnSp>
+        <p:nvCxnSpPr>
+          <p:cNvPr id="17" name="Straight Arrow Connector 16">
+            <a:extLst>
+              <a:ext uri="{FF2B5EF4-FFF2-40B4-BE49-F238E27FC236}">
+                <a16:creationId xmlns:a16="http://schemas.microsoft.com/office/drawing/2014/main" id="{0BFB8A77-2B35-1470-4EFB-4F9A99948217}"/>
+              </a:ext>
+            </a:extLst>
+          </p:cNvPr>
+          <p:cNvCxnSpPr/>
+          <p:nvPr/>
+        </p:nvCxnSpPr>
+        <p:spPr>
+          <a:xfrm>
+            <a:off x="344032" y="5413972"/>
+            <a:ext cx="660903" cy="0"/>
+          </a:xfrm>
+          <a:prstGeom prst="straightConnector1">
+            <a:avLst/>
+          </a:prstGeom>
+          <a:ln>
+            <a:tailEnd type="triangle"/>
+          </a:ln>
+        </p:spPr>
+        <p:style>
+          <a:lnRef idx="1">
+            <a:schemeClr val="accent1"/>
+          </a:lnRef>
+          <a:fillRef idx="0">
+            <a:schemeClr val="accent1"/>
+          </a:fillRef>
+          <a:effectRef idx="0">
+            <a:schemeClr val="accent1"/>
+          </a:effectRef>
+          <a:fontRef idx="minor">
+            <a:schemeClr val="tx1"/>
+          </a:fontRef>
+        </p:style>
+      </p:cxnSp>
+      <p:cxnSp>
+        <p:nvCxnSpPr>
+          <p:cNvPr id="19" name="Straight Arrow Connector 18">
+            <a:extLst>
+              <a:ext uri="{FF2B5EF4-FFF2-40B4-BE49-F238E27FC236}">
+                <a16:creationId xmlns:a16="http://schemas.microsoft.com/office/drawing/2014/main" id="{08C114FD-E741-61B0-A144-3D641A0933E9}"/>
+              </a:ext>
+            </a:extLst>
+          </p:cNvPr>
+          <p:cNvCxnSpPr/>
+          <p:nvPr/>
+        </p:nvCxnSpPr>
+        <p:spPr>
+          <a:xfrm>
+            <a:off x="344032" y="5748950"/>
+            <a:ext cx="660903" cy="0"/>
+          </a:xfrm>
+          <a:prstGeom prst="straightConnector1">
+            <a:avLst/>
+          </a:prstGeom>
+          <a:ln>
+            <a:tailEnd type="triangle"/>
+          </a:ln>
+        </p:spPr>
+        <p:style>
+          <a:lnRef idx="1">
+            <a:schemeClr val="accent1"/>
+          </a:lnRef>
+          <a:fillRef idx="0">
+            <a:schemeClr val="accent1"/>
+          </a:fillRef>
+          <a:effectRef idx="0">
+            <a:schemeClr val="accent1"/>
+          </a:effectRef>
+          <a:fontRef idx="minor">
+            <a:schemeClr val="tx1"/>
+          </a:fontRef>
+        </p:style>
+      </p:cxnSp>
+      <p:cxnSp>
+        <p:nvCxnSpPr>
+          <p:cNvPr id="21" name="Straight Arrow Connector 20">
+            <a:extLst>
+              <a:ext uri="{FF2B5EF4-FFF2-40B4-BE49-F238E27FC236}">
+                <a16:creationId xmlns:a16="http://schemas.microsoft.com/office/drawing/2014/main" id="{50279052-D46E-8B51-5BF8-46B5E4971CC3}"/>
+              </a:ext>
+            </a:extLst>
+          </p:cNvPr>
+          <p:cNvCxnSpPr/>
+          <p:nvPr/>
+        </p:nvCxnSpPr>
+        <p:spPr>
+          <a:xfrm>
+            <a:off x="344032" y="6056769"/>
+            <a:ext cx="660903" cy="0"/>
+          </a:xfrm>
+          <a:prstGeom prst="straightConnector1">
+            <a:avLst/>
+          </a:prstGeom>
+          <a:ln>
+            <a:tailEnd type="triangle"/>
+          </a:ln>
+        </p:spPr>
+        <p:style>
+          <a:lnRef idx="1">
+            <a:schemeClr val="accent1"/>
+          </a:lnRef>
+          <a:fillRef idx="0">
+            <a:schemeClr val="accent1"/>
+          </a:fillRef>
+          <a:effectRef idx="0">
+            <a:schemeClr val="accent1"/>
+          </a:effectRef>
+          <a:fontRef idx="minor">
+            <a:schemeClr val="tx1"/>
+          </a:fontRef>
+        </p:style>
+      </p:cxnSp>
+      <p:cxnSp>
+        <p:nvCxnSpPr>
+          <p:cNvPr id="23" name="Straight Arrow Connector 22">
+            <a:extLst>
+              <a:ext uri="{FF2B5EF4-FFF2-40B4-BE49-F238E27FC236}">
+                <a16:creationId xmlns:a16="http://schemas.microsoft.com/office/drawing/2014/main" id="{F3C65A2C-DDD5-9AC0-2DBA-12C76847A805}"/>
+              </a:ext>
+            </a:extLst>
+          </p:cNvPr>
+          <p:cNvCxnSpPr/>
+          <p:nvPr/>
+        </p:nvCxnSpPr>
+        <p:spPr>
+          <a:xfrm>
+            <a:off x="1376127" y="3427268"/>
+            <a:ext cx="715224" cy="526126"/>
+          </a:xfrm>
+          <a:prstGeom prst="straightConnector1">
+            <a:avLst/>
+          </a:prstGeom>
+          <a:ln>
+            <a:tailEnd type="triangle"/>
+          </a:ln>
+        </p:spPr>
+        <p:style>
+          <a:lnRef idx="1">
+            <a:schemeClr val="accent1"/>
+          </a:lnRef>
+          <a:fillRef idx="0">
+            <a:schemeClr val="accent1"/>
+          </a:fillRef>
+          <a:effectRef idx="0">
+            <a:schemeClr val="accent1"/>
+          </a:effectRef>
+          <a:fontRef idx="minor">
+            <a:schemeClr val="tx1"/>
+          </a:fontRef>
+        </p:style>
+      </p:cxnSp>
+      <p:sp>
+        <p:nvSpPr>
+          <p:cNvPr id="24" name="TextBox 23">
+            <a:extLst>
+              <a:ext uri="{FF2B5EF4-FFF2-40B4-BE49-F238E27FC236}">
+                <a16:creationId xmlns:a16="http://schemas.microsoft.com/office/drawing/2014/main" id="{97136920-BC9B-239B-CB4E-466CE7834E32}"/>
+              </a:ext>
+            </a:extLst>
+          </p:cNvPr>
+          <p:cNvSpPr txBox="1"/>
+          <p:nvPr/>
+        </p:nvSpPr>
+        <p:spPr>
+          <a:xfrm>
+            <a:off x="941560" y="3109312"/>
+            <a:ext cx="823866" cy="369332"/>
+          </a:xfrm>
+          <a:prstGeom prst="rect">
+            <a:avLst/>
+          </a:prstGeom>
+          <a:noFill/>
+        </p:spPr>
+        <p:txBody>
+          <a:bodyPr wrap="square" rtlCol="0">
+            <a:spAutoFit/>
+          </a:bodyPr>
+          <a:lstStyle/>
+          <a:p>
+            <a:r>
+              <a:rPr lang="en-US"/>
+              <a:t>step</a:t>
+            </a:r>
           </a:p>
         </p:txBody>
       </p:sp>
     </p:spTree>
     <p:extLst>
       <p:ext uri="{BB962C8B-B14F-4D97-AF65-F5344CB8AC3E}">
-        <p14:creationId xmlns:p14="http://schemas.microsoft.com/office/powerpoint/2010/main" val="472883612"/>
+        <p14:creationId xmlns:p14="http://schemas.microsoft.com/office/powerpoint/2010/main" val="3451901083"/>
       </p:ext>
     </p:extLst>
   </p:cSld>

--- a/Slide/MicroController/08.Timer.pptx
+++ b/Slide/MicroController/08.Timer.pptx
@@ -262,7 +262,7 @@
           <a:p>
             <a:fld id="{ECA3AE87-C17F-4F2C-92FF-7FE21F8A66BE}" type="datetimeFigureOut">
               <a:rPr lang="en-US" smtClean="0"/>
-              <a:t>2/11/2025</a:t>
+              <a:t>6/23/2025</a:t>
             </a:fld>
             <a:endParaRPr lang="en-US"/>
           </a:p>
@@ -430,7 +430,7 @@
           <a:p>
             <a:fld id="{ECA3AE87-C17F-4F2C-92FF-7FE21F8A66BE}" type="datetimeFigureOut">
               <a:rPr lang="en-US" smtClean="0"/>
-              <a:t>2/11/2025</a:t>
+              <a:t>6/23/2025</a:t>
             </a:fld>
             <a:endParaRPr lang="en-US"/>
           </a:p>
@@ -608,7 +608,7 @@
           <a:p>
             <a:fld id="{ECA3AE87-C17F-4F2C-92FF-7FE21F8A66BE}" type="datetimeFigureOut">
               <a:rPr lang="en-US" smtClean="0"/>
-              <a:t>2/11/2025</a:t>
+              <a:t>6/23/2025</a:t>
             </a:fld>
             <a:endParaRPr lang="en-US"/>
           </a:p>
@@ -776,7 +776,7 @@
           <a:p>
             <a:fld id="{ECA3AE87-C17F-4F2C-92FF-7FE21F8A66BE}" type="datetimeFigureOut">
               <a:rPr lang="en-US" smtClean="0"/>
-              <a:t>2/11/2025</a:t>
+              <a:t>6/23/2025</a:t>
             </a:fld>
             <a:endParaRPr lang="en-US"/>
           </a:p>
@@ -1021,7 +1021,7 @@
           <a:p>
             <a:fld id="{ECA3AE87-C17F-4F2C-92FF-7FE21F8A66BE}" type="datetimeFigureOut">
               <a:rPr lang="en-US" smtClean="0"/>
-              <a:t>2/11/2025</a:t>
+              <a:t>6/23/2025</a:t>
             </a:fld>
             <a:endParaRPr lang="en-US"/>
           </a:p>
@@ -1250,7 +1250,7 @@
           <a:p>
             <a:fld id="{ECA3AE87-C17F-4F2C-92FF-7FE21F8A66BE}" type="datetimeFigureOut">
               <a:rPr lang="en-US" smtClean="0"/>
-              <a:t>2/11/2025</a:t>
+              <a:t>6/23/2025</a:t>
             </a:fld>
             <a:endParaRPr lang="en-US"/>
           </a:p>
@@ -1614,7 +1614,7 @@
           <a:p>
             <a:fld id="{ECA3AE87-C17F-4F2C-92FF-7FE21F8A66BE}" type="datetimeFigureOut">
               <a:rPr lang="en-US" smtClean="0"/>
-              <a:t>2/11/2025</a:t>
+              <a:t>6/23/2025</a:t>
             </a:fld>
             <a:endParaRPr lang="en-US"/>
           </a:p>
@@ -1731,7 +1731,7 @@
           <a:p>
             <a:fld id="{ECA3AE87-C17F-4F2C-92FF-7FE21F8A66BE}" type="datetimeFigureOut">
               <a:rPr lang="en-US" smtClean="0"/>
-              <a:t>2/11/2025</a:t>
+              <a:t>6/23/2025</a:t>
             </a:fld>
             <a:endParaRPr lang="en-US"/>
           </a:p>
@@ -1826,7 +1826,7 @@
           <a:p>
             <a:fld id="{ECA3AE87-C17F-4F2C-92FF-7FE21F8A66BE}" type="datetimeFigureOut">
               <a:rPr lang="en-US" smtClean="0"/>
-              <a:t>2/11/2025</a:t>
+              <a:t>6/23/2025</a:t>
             </a:fld>
             <a:endParaRPr lang="en-US"/>
           </a:p>
@@ -2101,7 +2101,7 @@
           <a:p>
             <a:fld id="{ECA3AE87-C17F-4F2C-92FF-7FE21F8A66BE}" type="datetimeFigureOut">
               <a:rPr lang="en-US" smtClean="0"/>
-              <a:t>2/11/2025</a:t>
+              <a:t>6/23/2025</a:t>
             </a:fld>
             <a:endParaRPr lang="en-US"/>
           </a:p>
@@ -2353,7 +2353,7 @@
           <a:p>
             <a:fld id="{ECA3AE87-C17F-4F2C-92FF-7FE21F8A66BE}" type="datetimeFigureOut">
               <a:rPr lang="en-US" smtClean="0"/>
-              <a:t>2/11/2025</a:t>
+              <a:t>6/23/2025</a:t>
             </a:fld>
             <a:endParaRPr lang="en-US"/>
           </a:p>
@@ -2564,7 +2564,7 @@
           <a:p>
             <a:fld id="{ECA3AE87-C17F-4F2C-92FF-7FE21F8A66BE}" type="datetimeFigureOut">
               <a:rPr lang="en-US" smtClean="0"/>
-              <a:t>2/11/2025</a:t>
+              <a:t>6/23/2025</a:t>
             </a:fld>
             <a:endParaRPr lang="en-US"/>
           </a:p>
